--- a/docker_intro.pptx
+++ b/docker_intro.pptx
@@ -206,7 +206,7 @@
           <a:p>
             <a:fld id="{9A0257BA-3AB2-914B-B1C7-8E64980B0969}" type="datetimeFigureOut">
               <a:rPr lang="en-US" smtClean="0"/>
-              <a:t>11/4/19</a:t>
+              <a:t>5/27/20</a:t>
             </a:fld>
             <a:endParaRPr lang="en-US"/>
           </a:p>
@@ -872,7 +872,7 @@
           <a:p>
             <a:fld id="{58E89A2C-8675-FD42-8E16-D355BB796D05}" type="datetimeFigureOut">
               <a:rPr lang="en-US" smtClean="0"/>
-              <a:t>11/4/19</a:t>
+              <a:t>5/27/20</a:t>
             </a:fld>
             <a:endParaRPr lang="en-US"/>
           </a:p>
@@ -1070,7 +1070,7 @@
           <a:p>
             <a:fld id="{58E89A2C-8675-FD42-8E16-D355BB796D05}" type="datetimeFigureOut">
               <a:rPr lang="en-US" smtClean="0"/>
-              <a:t>11/4/19</a:t>
+              <a:t>5/27/20</a:t>
             </a:fld>
             <a:endParaRPr lang="en-US"/>
           </a:p>
@@ -1278,7 +1278,7 @@
           <a:p>
             <a:fld id="{58E89A2C-8675-FD42-8E16-D355BB796D05}" type="datetimeFigureOut">
               <a:rPr lang="en-US" smtClean="0"/>
-              <a:t>11/4/19</a:t>
+              <a:t>5/27/20</a:t>
             </a:fld>
             <a:endParaRPr lang="en-US"/>
           </a:p>
@@ -1476,7 +1476,7 @@
           <a:p>
             <a:fld id="{58E89A2C-8675-FD42-8E16-D355BB796D05}" type="datetimeFigureOut">
               <a:rPr lang="en-US" smtClean="0"/>
-              <a:t>11/4/19</a:t>
+              <a:t>5/27/20</a:t>
             </a:fld>
             <a:endParaRPr lang="en-US"/>
           </a:p>
@@ -1751,7 +1751,7 @@
           <a:p>
             <a:fld id="{58E89A2C-8675-FD42-8E16-D355BB796D05}" type="datetimeFigureOut">
               <a:rPr lang="en-US" smtClean="0"/>
-              <a:t>11/4/19</a:t>
+              <a:t>5/27/20</a:t>
             </a:fld>
             <a:endParaRPr lang="en-US"/>
           </a:p>
@@ -2016,7 +2016,7 @@
           <a:p>
             <a:fld id="{58E89A2C-8675-FD42-8E16-D355BB796D05}" type="datetimeFigureOut">
               <a:rPr lang="en-US" smtClean="0"/>
-              <a:t>11/4/19</a:t>
+              <a:t>5/27/20</a:t>
             </a:fld>
             <a:endParaRPr lang="en-US"/>
           </a:p>
@@ -2428,7 +2428,7 @@
           <a:p>
             <a:fld id="{58E89A2C-8675-FD42-8E16-D355BB796D05}" type="datetimeFigureOut">
               <a:rPr lang="en-US" smtClean="0"/>
-              <a:t>11/4/19</a:t>
+              <a:t>5/27/20</a:t>
             </a:fld>
             <a:endParaRPr lang="en-US"/>
           </a:p>
@@ -2569,7 +2569,7 @@
           <a:p>
             <a:fld id="{58E89A2C-8675-FD42-8E16-D355BB796D05}" type="datetimeFigureOut">
               <a:rPr lang="en-US" smtClean="0"/>
-              <a:t>11/4/19</a:t>
+              <a:t>5/27/20</a:t>
             </a:fld>
             <a:endParaRPr lang="en-US"/>
           </a:p>
@@ -2682,7 +2682,7 @@
           <a:p>
             <a:fld id="{58E89A2C-8675-FD42-8E16-D355BB796D05}" type="datetimeFigureOut">
               <a:rPr lang="en-US" smtClean="0"/>
-              <a:t>11/4/19</a:t>
+              <a:t>5/27/20</a:t>
             </a:fld>
             <a:endParaRPr lang="en-US"/>
           </a:p>
@@ -2993,7 +2993,7 @@
           <a:p>
             <a:fld id="{58E89A2C-8675-FD42-8E16-D355BB796D05}" type="datetimeFigureOut">
               <a:rPr lang="en-US" smtClean="0"/>
-              <a:t>11/4/19</a:t>
+              <a:t>5/27/20</a:t>
             </a:fld>
             <a:endParaRPr lang="en-US"/>
           </a:p>
@@ -3281,7 +3281,7 @@
           <a:p>
             <a:fld id="{58E89A2C-8675-FD42-8E16-D355BB796D05}" type="datetimeFigureOut">
               <a:rPr lang="en-US" smtClean="0"/>
-              <a:t>11/4/19</a:t>
+              <a:t>5/27/20</a:t>
             </a:fld>
             <a:endParaRPr lang="en-US"/>
           </a:p>
@@ -3522,7 +3522,7 @@
           <a:p>
             <a:fld id="{58E89A2C-8675-FD42-8E16-D355BB796D05}" type="datetimeFigureOut">
               <a:rPr lang="en-US" smtClean="0"/>
-              <a:t>11/4/19</a:t>
+              <a:t>5/27/20</a:t>
             </a:fld>
             <a:endParaRPr lang="en-US"/>
           </a:p>
@@ -4647,7 +4647,7 @@
         <p:spPr>
           <a:xfrm>
             <a:off x="0" y="646331"/>
-            <a:ext cx="12192000" cy="4031873"/>
+            <a:ext cx="10986052" cy="2308324"/>
           </a:xfrm>
           <a:prstGeom prst="rect">
             <a:avLst/>
@@ -4715,12 +4715,13 @@
             </a:r>
           </a:p>
           <a:p>
-            <a:endParaRPr lang="en-US" sz="1600" dirty="0">
-              <a:latin typeface="Consolas" panose="020B0609020204030204" pitchFamily="49" charset="0"/>
-              <a:cs typeface="Consolas" panose="020B0609020204030204" pitchFamily="49" charset="0"/>
-            </a:endParaRPr>
-          </a:p>
-          <a:p>
+            <a:r>
+              <a:rPr lang="en-US" sz="1600" dirty="0">
+                <a:latin typeface="Consolas" panose="020B0609020204030204" pitchFamily="49" charset="0"/>
+                <a:cs typeface="Consolas" panose="020B0609020204030204" pitchFamily="49" charset="0"/>
+              </a:rPr>
+              <a:t> - </a:t>
+            </a:r>
             <a:r>
               <a:rPr lang="en-US" sz="1600" dirty="0">
                 <a:hlinkClick r:id="rId2"/>
@@ -4733,12 +4734,13 @@
             </a:r>
           </a:p>
           <a:p>
-            <a:endParaRPr lang="en-US" sz="1600" dirty="0">
-              <a:latin typeface="Consolas" panose="020B0609020204030204" pitchFamily="49" charset="0"/>
-              <a:cs typeface="Consolas" panose="020B0609020204030204" pitchFamily="49" charset="0"/>
-            </a:endParaRPr>
-          </a:p>
-          <a:p>
+            <a:r>
+              <a:rPr lang="en-US" sz="1600" dirty="0">
+                <a:latin typeface="Consolas" panose="020B0609020204030204" pitchFamily="49" charset="0"/>
+                <a:cs typeface="Consolas" panose="020B0609020204030204" pitchFamily="49" charset="0"/>
+              </a:rPr>
+              <a:t> - </a:t>
+            </a:r>
             <a:r>
               <a:rPr lang="en-US" sz="1600" dirty="0">
                 <a:hlinkClick r:id="rId3"/>
@@ -4748,12 +4750,13 @@
             <a:endParaRPr lang="en-US" sz="1600" dirty="0"/>
           </a:p>
           <a:p>
-            <a:endParaRPr lang="en-US" sz="1600" dirty="0">
-              <a:latin typeface="Consolas" panose="020B0609020204030204" pitchFamily="49" charset="0"/>
-              <a:cs typeface="Consolas" panose="020B0609020204030204" pitchFamily="49" charset="0"/>
-            </a:endParaRPr>
-          </a:p>
-          <a:p>
+            <a:r>
+              <a:rPr lang="en-US" sz="1600" dirty="0">
+                <a:latin typeface="Consolas" panose="020B0609020204030204" pitchFamily="49" charset="0"/>
+                <a:cs typeface="Consolas" panose="020B0609020204030204" pitchFamily="49" charset="0"/>
+              </a:rPr>
+              <a:t> - </a:t>
+            </a:r>
             <a:r>
               <a:rPr lang="en-US" sz="1600" dirty="0">
                 <a:hlinkClick r:id="rId4"/>
@@ -4763,12 +4766,13 @@
             <a:endParaRPr lang="en-US" sz="1600" dirty="0"/>
           </a:p>
           <a:p>
-            <a:endParaRPr lang="en-US" sz="1600" dirty="0">
-              <a:latin typeface="Consolas" panose="020B0609020204030204" pitchFamily="49" charset="0"/>
-              <a:cs typeface="Consolas" panose="020B0609020204030204" pitchFamily="49" charset="0"/>
-            </a:endParaRPr>
-          </a:p>
-          <a:p>
+            <a:r>
+              <a:rPr lang="en-US" sz="1600" dirty="0">
+                <a:latin typeface="Consolas" panose="020B0609020204030204" pitchFamily="49" charset="0"/>
+                <a:cs typeface="Consolas" panose="020B0609020204030204" pitchFamily="49" charset="0"/>
+              </a:rPr>
+              <a:t> - </a:t>
+            </a:r>
             <a:r>
               <a:rPr lang="en-US" sz="1600" dirty="0">
                 <a:hlinkClick r:id="rId5"/>
@@ -4778,12 +4782,13 @@
             <a:endParaRPr lang="en-US" sz="1600" dirty="0"/>
           </a:p>
           <a:p>
-            <a:endParaRPr lang="en-US" sz="1600" dirty="0">
-              <a:latin typeface="Consolas" panose="020B0609020204030204" pitchFamily="49" charset="0"/>
-              <a:cs typeface="Consolas" panose="020B0609020204030204" pitchFamily="49" charset="0"/>
-            </a:endParaRPr>
-          </a:p>
-          <a:p>
+            <a:r>
+              <a:rPr lang="en-US" sz="1600" dirty="0">
+                <a:latin typeface="Consolas" panose="020B0609020204030204" pitchFamily="49" charset="0"/>
+                <a:cs typeface="Consolas" panose="020B0609020204030204" pitchFamily="49" charset="0"/>
+              </a:rPr>
+              <a:t> - </a:t>
+            </a:r>
             <a:r>
               <a:rPr lang="en-US" sz="1600" dirty="0">
                 <a:hlinkClick r:id="rId6"/>
@@ -4793,12 +4798,13 @@
             <a:endParaRPr lang="en-US" sz="1600" dirty="0"/>
           </a:p>
           <a:p>
-            <a:endParaRPr lang="en-US" sz="1600" dirty="0">
-              <a:latin typeface="Consolas" panose="020B0609020204030204" pitchFamily="49" charset="0"/>
-              <a:cs typeface="Consolas" panose="020B0609020204030204" pitchFamily="49" charset="0"/>
-            </a:endParaRPr>
-          </a:p>
-          <a:p>
+            <a:r>
+              <a:rPr lang="en-US" sz="1600" dirty="0">
+                <a:latin typeface="Consolas" panose="020B0609020204030204" pitchFamily="49" charset="0"/>
+                <a:cs typeface="Consolas" panose="020B0609020204030204" pitchFamily="49" charset="0"/>
+              </a:rPr>
+              <a:t> - </a:t>
+            </a:r>
             <a:r>
               <a:rPr lang="en-US" sz="1600" dirty="0">
                 <a:hlinkClick r:id="rId7"/>
@@ -4806,12 +4812,6 @@
               <a:t>https://github.com/mcuadros/ofelia</a:t>
             </a:r>
             <a:endParaRPr lang="en-US" sz="1600" dirty="0"/>
-          </a:p>
-          <a:p>
-            <a:endParaRPr lang="en-US" sz="1600" dirty="0">
-              <a:latin typeface="Consolas" panose="020B0609020204030204" pitchFamily="49" charset="0"/>
-              <a:cs typeface="Consolas" panose="020B0609020204030204" pitchFamily="49" charset="0"/>
-            </a:endParaRPr>
           </a:p>
         </p:txBody>
       </p:sp>
@@ -8692,7 +8692,7 @@
         <p:spPr>
           <a:xfrm>
             <a:off x="0" y="646331"/>
-            <a:ext cx="12192000" cy="6494085"/>
+            <a:ext cx="11529391" cy="6001643"/>
           </a:xfrm>
           <a:prstGeom prst="rect">
             <a:avLst/>
@@ -8753,7 +8753,16 @@
                 <a:latin typeface="Consolas" panose="020B0609020204030204" pitchFamily="49" charset="0"/>
                 <a:cs typeface="Consolas" panose="020B0609020204030204" pitchFamily="49" charset="0"/>
               </a:rPr>
-              <a:t>How to tell docker which DNS servers to use: </a:t>
+              <a:t>How to tell docker which DNS servers to use:</a:t>
+            </a:r>
+          </a:p>
+          <a:p>
+            <a:r>
+              <a:rPr lang="en-US" sz="1600" dirty="0">
+                <a:latin typeface="Consolas" panose="020B0609020204030204" pitchFamily="49" charset="0"/>
+                <a:cs typeface="Consolas" panose="020B0609020204030204" pitchFamily="49" charset="0"/>
+              </a:rPr>
+              <a:t> - </a:t>
             </a:r>
             <a:r>
               <a:rPr lang="en-US" sz="1600" dirty="0">
@@ -9076,25 +9085,8 @@
             </a:r>
             <a:r>
               <a:rPr lang="en-US" sz="1600" dirty="0"/>
-              <a:t> </a:t>
-            </a:r>
-          </a:p>
-          <a:p>
-            <a:endParaRPr lang="en-US" sz="1600" dirty="0">
-              <a:latin typeface="Consolas" panose="020B0609020204030204" pitchFamily="49" charset="0"/>
-              <a:cs typeface="Consolas" panose="020B0609020204030204" pitchFamily="49" charset="0"/>
-            </a:endParaRPr>
-          </a:p>
-          <a:p>
-            <a:r>
-              <a:rPr lang="en-US" sz="1600" dirty="0">
-                <a:latin typeface="Consolas" panose="020B0609020204030204" pitchFamily="49" charset="0"/>
-                <a:cs typeface="Consolas" panose="020B0609020204030204" pitchFamily="49" charset="0"/>
-              </a:rPr>
-              <a:t>Xxx</a:t>
-            </a:r>
-          </a:p>
-          <a:p>
+              <a:t>  </a:t>
+            </a:r>
             <a:endParaRPr lang="en-US" sz="1600" dirty="0">
               <a:latin typeface="Consolas" panose="020B0609020204030204" pitchFamily="49" charset="0"/>
               <a:cs typeface="Consolas" panose="020B0609020204030204" pitchFamily="49" charset="0"/>

--- a/docker_intro.pptx
+++ b/docker_intro.pptx
@@ -206,7 +206,7 @@
           <a:p>
             <a:fld id="{9A0257BA-3AB2-914B-B1C7-8E64980B0969}" type="datetimeFigureOut">
               <a:rPr lang="en-US" smtClean="0"/>
-              <a:t>5/27/20</a:t>
+              <a:t>9/14/20</a:t>
             </a:fld>
             <a:endParaRPr lang="en-US"/>
           </a:p>
@@ -872,7 +872,7 @@
           <a:p>
             <a:fld id="{58E89A2C-8675-FD42-8E16-D355BB796D05}" type="datetimeFigureOut">
               <a:rPr lang="en-US" smtClean="0"/>
-              <a:t>5/27/20</a:t>
+              <a:t>9/14/20</a:t>
             </a:fld>
             <a:endParaRPr lang="en-US"/>
           </a:p>
@@ -1070,7 +1070,7 @@
           <a:p>
             <a:fld id="{58E89A2C-8675-FD42-8E16-D355BB796D05}" type="datetimeFigureOut">
               <a:rPr lang="en-US" smtClean="0"/>
-              <a:t>5/27/20</a:t>
+              <a:t>9/14/20</a:t>
             </a:fld>
             <a:endParaRPr lang="en-US"/>
           </a:p>
@@ -1278,7 +1278,7 @@
           <a:p>
             <a:fld id="{58E89A2C-8675-FD42-8E16-D355BB796D05}" type="datetimeFigureOut">
               <a:rPr lang="en-US" smtClean="0"/>
-              <a:t>5/27/20</a:t>
+              <a:t>9/14/20</a:t>
             </a:fld>
             <a:endParaRPr lang="en-US"/>
           </a:p>
@@ -1476,7 +1476,7 @@
           <a:p>
             <a:fld id="{58E89A2C-8675-FD42-8E16-D355BB796D05}" type="datetimeFigureOut">
               <a:rPr lang="en-US" smtClean="0"/>
-              <a:t>5/27/20</a:t>
+              <a:t>9/14/20</a:t>
             </a:fld>
             <a:endParaRPr lang="en-US"/>
           </a:p>
@@ -1751,7 +1751,7 @@
           <a:p>
             <a:fld id="{58E89A2C-8675-FD42-8E16-D355BB796D05}" type="datetimeFigureOut">
               <a:rPr lang="en-US" smtClean="0"/>
-              <a:t>5/27/20</a:t>
+              <a:t>9/14/20</a:t>
             </a:fld>
             <a:endParaRPr lang="en-US"/>
           </a:p>
@@ -2016,7 +2016,7 @@
           <a:p>
             <a:fld id="{58E89A2C-8675-FD42-8E16-D355BB796D05}" type="datetimeFigureOut">
               <a:rPr lang="en-US" smtClean="0"/>
-              <a:t>5/27/20</a:t>
+              <a:t>9/14/20</a:t>
             </a:fld>
             <a:endParaRPr lang="en-US"/>
           </a:p>
@@ -2428,7 +2428,7 @@
           <a:p>
             <a:fld id="{58E89A2C-8675-FD42-8E16-D355BB796D05}" type="datetimeFigureOut">
               <a:rPr lang="en-US" smtClean="0"/>
-              <a:t>5/27/20</a:t>
+              <a:t>9/14/20</a:t>
             </a:fld>
             <a:endParaRPr lang="en-US"/>
           </a:p>
@@ -2569,7 +2569,7 @@
           <a:p>
             <a:fld id="{58E89A2C-8675-FD42-8E16-D355BB796D05}" type="datetimeFigureOut">
               <a:rPr lang="en-US" smtClean="0"/>
-              <a:t>5/27/20</a:t>
+              <a:t>9/14/20</a:t>
             </a:fld>
             <a:endParaRPr lang="en-US"/>
           </a:p>
@@ -2682,7 +2682,7 @@
           <a:p>
             <a:fld id="{58E89A2C-8675-FD42-8E16-D355BB796D05}" type="datetimeFigureOut">
               <a:rPr lang="en-US" smtClean="0"/>
-              <a:t>5/27/20</a:t>
+              <a:t>9/14/20</a:t>
             </a:fld>
             <a:endParaRPr lang="en-US"/>
           </a:p>
@@ -2993,7 +2993,7 @@
           <a:p>
             <a:fld id="{58E89A2C-8675-FD42-8E16-D355BB796D05}" type="datetimeFigureOut">
               <a:rPr lang="en-US" smtClean="0"/>
-              <a:t>5/27/20</a:t>
+              <a:t>9/14/20</a:t>
             </a:fld>
             <a:endParaRPr lang="en-US"/>
           </a:p>
@@ -3281,7 +3281,7 @@
           <a:p>
             <a:fld id="{58E89A2C-8675-FD42-8E16-D355BB796D05}" type="datetimeFigureOut">
               <a:rPr lang="en-US" smtClean="0"/>
-              <a:t>5/27/20</a:t>
+              <a:t>9/14/20</a:t>
             </a:fld>
             <a:endParaRPr lang="en-US"/>
           </a:p>
@@ -3522,7 +3522,7 @@
           <a:p>
             <a:fld id="{58E89A2C-8675-FD42-8E16-D355BB796D05}" type="datetimeFigureOut">
               <a:rPr lang="en-US" smtClean="0"/>
-              <a:t>5/27/20</a:t>
+              <a:t>9/14/20</a:t>
             </a:fld>
             <a:endParaRPr lang="en-US"/>
           </a:p>
@@ -4362,7 +4362,7 @@
               <a:rPr lang="en-US" sz="1000" dirty="0">
                 <a:latin typeface="Andale Mono" panose="020B0509000000000004" pitchFamily="49" charset="0"/>
               </a:rPr>
-              <a:t>Make a list of IDs of all exited containers:</a:t>
+              <a:t># Make a list of IDs of all exited containers:</a:t>
             </a:r>
           </a:p>
           <a:p>
@@ -4395,7 +4395,7 @@
               <a:rPr lang="en-US" sz="1000" dirty="0">
                 <a:latin typeface="Andale Mono" panose="020B0509000000000004" pitchFamily="49" charset="0"/>
               </a:rPr>
-              <a:t>Remove them from list:</a:t>
+              <a:t># Remove them from list:</a:t>
             </a:r>
           </a:p>
           <a:p>
